--- a/SentinelScan.pptx
+++ b/SentinelScan.pptx
@@ -117,6 +117,408 @@
     </p:ext>
   </p:extLst>
 </p:presentation>
+</file>
+
+<file path=ppt/revisionInfo.xml><?xml version="1.0" encoding="utf-8"?>
+<p1510:revInfo xmlns:a="http://schemas.openxmlformats.org/drawingml/2006/main" xmlns:r="http://schemas.openxmlformats.org/officeDocument/2006/relationships" xmlns:p1510="http://schemas.microsoft.com/office/powerpoint/2015/10/main">
+  <p1510:revLst>
+    <p1510:client id="{EB3D6489-9DA7-49D3-8CC7-0351417C191D}" v="4" dt="2026-09-16T06:27:43.260"/>
+  </p1510:revLst>
+</p1510:revInfo>
+</file>
+
+<file path=ppt/changesInfos/changesInfo1.xml><?xml version="1.0" encoding="utf-8"?>
+<pc:chgInfo xmlns:a="http://schemas.openxmlformats.org/drawingml/2006/main" xmlns:r="http://schemas.openxmlformats.org/officeDocument/2006/relationships" xmlns:ac="http://schemas.microsoft.com/office/drawing/2013/main/command" xmlns:pc="http://schemas.microsoft.com/office/powerpoint/2013/main/command">
+  <pc:docChgLst>
+    <pc:chgData name="Luv rawal" userId="666fe3837bd18505" providerId="LiveId" clId="{304912EA-2BFD-4C77-8C7E-1AF34E9DA1B0}"/>
+    <pc:docChg chg="undo custSel modSld">
+      <pc:chgData name="Luv rawal" userId="666fe3837bd18505" providerId="LiveId" clId="{304912EA-2BFD-4C77-8C7E-1AF34E9DA1B0}" dt="2026-09-16T10:23:38.211" v="60" actId="1076"/>
+      <pc:docMkLst>
+        <pc:docMk/>
+      </pc:docMkLst>
+      <pc:sldChg chg="modSp mod">
+        <pc:chgData name="Luv rawal" userId="666fe3837bd18505" providerId="LiveId" clId="{304912EA-2BFD-4C77-8C7E-1AF34E9DA1B0}" dt="2026-09-16T10:23:38.211" v="60" actId="1076"/>
+        <pc:sldMkLst>
+          <pc:docMk/>
+          <pc:sldMk cId="0" sldId="256"/>
+        </pc:sldMkLst>
+        <pc:spChg chg="mod">
+          <ac:chgData name="Luv rawal" userId="666fe3837bd18505" providerId="LiveId" clId="{304912EA-2BFD-4C77-8C7E-1AF34E9DA1B0}" dt="2026-09-16T10:23:38.211" v="60" actId="1076"/>
+          <ac:spMkLst>
+            <pc:docMk/>
+            <pc:sldMk cId="0" sldId="256"/>
+            <ac:spMk id="3" creationId="{00000000-0000-0000-0000-000000000000}"/>
+          </ac:spMkLst>
+        </pc:spChg>
+        <pc:spChg chg="mod">
+          <ac:chgData name="Luv rawal" userId="666fe3837bd18505" providerId="LiveId" clId="{304912EA-2BFD-4C77-8C7E-1AF34E9DA1B0}" dt="2026-09-16T05:43:06.300" v="23" actId="1076"/>
+          <ac:spMkLst>
+            <pc:docMk/>
+            <pc:sldMk cId="0" sldId="256"/>
+            <ac:spMk id="4" creationId="{00000000-0000-0000-0000-000000000000}"/>
+          </ac:spMkLst>
+        </pc:spChg>
+        <pc:spChg chg="mod">
+          <ac:chgData name="Luv rawal" userId="666fe3837bd18505" providerId="LiveId" clId="{304912EA-2BFD-4C77-8C7E-1AF34E9DA1B0}" dt="2026-09-16T05:42:28.352" v="17" actId="255"/>
+          <ac:spMkLst>
+            <pc:docMk/>
+            <pc:sldMk cId="0" sldId="256"/>
+            <ac:spMk id="21" creationId="{57253FC2-9973-FA13-F476-69CBB102D46C}"/>
+          </ac:spMkLst>
+        </pc:spChg>
+        <pc:spChg chg="mod">
+          <ac:chgData name="Luv rawal" userId="666fe3837bd18505" providerId="LiveId" clId="{304912EA-2BFD-4C77-8C7E-1AF34E9DA1B0}" dt="2026-09-16T05:42:43.184" v="19" actId="255"/>
+          <ac:spMkLst>
+            <pc:docMk/>
+            <pc:sldMk cId="0" sldId="256"/>
+            <ac:spMk id="23" creationId="{5EB6791E-E683-94EE-54F9-ADD331165124}"/>
+          </ac:spMkLst>
+        </pc:spChg>
+        <pc:spChg chg="mod">
+          <ac:chgData name="Luv rawal" userId="666fe3837bd18505" providerId="LiveId" clId="{304912EA-2BFD-4C77-8C7E-1AF34E9DA1B0}" dt="2026-09-16T05:42:52.684" v="21" actId="255"/>
+          <ac:spMkLst>
+            <pc:docMk/>
+            <pc:sldMk cId="0" sldId="256"/>
+            <ac:spMk id="25" creationId="{D168B8AB-AE89-BDA9-9853-B4318A963EFA}"/>
+          </ac:spMkLst>
+        </pc:spChg>
+        <pc:spChg chg="mod">
+          <ac:chgData name="Luv rawal" userId="666fe3837bd18505" providerId="LiveId" clId="{304912EA-2BFD-4C77-8C7E-1AF34E9DA1B0}" dt="2026-09-16T05:42:36.866" v="18" actId="255"/>
+          <ac:spMkLst>
+            <pc:docMk/>
+            <pc:sldMk cId="0" sldId="256"/>
+            <ac:spMk id="27" creationId="{9D45D302-06D2-64C1-6BAC-F44829056D59}"/>
+          </ac:spMkLst>
+        </pc:spChg>
+        <pc:spChg chg="mod">
+          <ac:chgData name="Luv rawal" userId="666fe3837bd18505" providerId="LiveId" clId="{304912EA-2BFD-4C77-8C7E-1AF34E9DA1B0}" dt="2026-09-16T05:42:47.954" v="20" actId="255"/>
+          <ac:spMkLst>
+            <pc:docMk/>
+            <pc:sldMk cId="0" sldId="256"/>
+            <ac:spMk id="29" creationId="{04C4AEDA-9F40-05B1-063C-1037D5DD3D2E}"/>
+          </ac:spMkLst>
+        </pc:spChg>
+        <pc:spChg chg="mod">
+          <ac:chgData name="Luv rawal" userId="666fe3837bd18505" providerId="LiveId" clId="{304912EA-2BFD-4C77-8C7E-1AF34E9DA1B0}" dt="2026-09-16T05:42:57.462" v="22" actId="255"/>
+          <ac:spMkLst>
+            <pc:docMk/>
+            <pc:sldMk cId="0" sldId="256"/>
+            <ac:spMk id="31" creationId="{D024486C-3D6D-1DF2-F07D-187BC934EDA8}"/>
+          </ac:spMkLst>
+        </pc:spChg>
+      </pc:sldChg>
+      <pc:sldChg chg="addSp modSp mod">
+        <pc:chgData name="Luv rawal" userId="666fe3837bd18505" providerId="LiveId" clId="{304912EA-2BFD-4C77-8C7E-1AF34E9DA1B0}" dt="2026-09-16T05:53:32.486" v="55" actId="1076"/>
+        <pc:sldMkLst>
+          <pc:docMk/>
+          <pc:sldMk cId="0" sldId="257"/>
+        </pc:sldMkLst>
+        <pc:spChg chg="mod">
+          <ac:chgData name="Luv rawal" userId="666fe3837bd18505" providerId="LiveId" clId="{304912EA-2BFD-4C77-8C7E-1AF34E9DA1B0}" dt="2026-09-16T05:53:32.486" v="55" actId="1076"/>
+          <ac:spMkLst>
+            <pc:docMk/>
+            <pc:sldMk cId="0" sldId="257"/>
+            <ac:spMk id="4" creationId="{00000000-0000-0000-0000-000000000000}"/>
+          </ac:spMkLst>
+        </pc:spChg>
+        <pc:spChg chg="mod">
+          <ac:chgData name="Luv rawal" userId="666fe3837bd18505" providerId="LiveId" clId="{304912EA-2BFD-4C77-8C7E-1AF34E9DA1B0}" dt="2026-09-16T05:53:09.528" v="49" actId="255"/>
+          <ac:spMkLst>
+            <pc:docMk/>
+            <pc:sldMk cId="0" sldId="257"/>
+            <ac:spMk id="5" creationId="{00000000-0000-0000-0000-000000000000}"/>
+          </ac:spMkLst>
+        </pc:spChg>
+        <pc:spChg chg="mod">
+          <ac:chgData name="Luv rawal" userId="666fe3837bd18505" providerId="LiveId" clId="{304912EA-2BFD-4C77-8C7E-1AF34E9DA1B0}" dt="2026-09-16T05:53:09.528" v="49" actId="255"/>
+          <ac:spMkLst>
+            <pc:docMk/>
+            <pc:sldMk cId="0" sldId="257"/>
+            <ac:spMk id="7" creationId="{00000000-0000-0000-0000-000000000000}"/>
+          </ac:spMkLst>
+        </pc:spChg>
+        <pc:spChg chg="mod">
+          <ac:chgData name="Luv rawal" userId="666fe3837bd18505" providerId="LiveId" clId="{304912EA-2BFD-4C77-8C7E-1AF34E9DA1B0}" dt="2026-09-16T05:53:27.031" v="54" actId="1076"/>
+          <ac:spMkLst>
+            <pc:docMk/>
+            <pc:sldMk cId="0" sldId="257"/>
+            <ac:spMk id="8" creationId="{00000000-0000-0000-0000-000000000000}"/>
+          </ac:spMkLst>
+        </pc:spChg>
+        <pc:spChg chg="mod">
+          <ac:chgData name="Luv rawal" userId="666fe3837bd18505" providerId="LiveId" clId="{304912EA-2BFD-4C77-8C7E-1AF34E9DA1B0}" dt="2026-09-16T05:53:09.528" v="49" actId="255"/>
+          <ac:spMkLst>
+            <pc:docMk/>
+            <pc:sldMk cId="0" sldId="257"/>
+            <ac:spMk id="9" creationId="{00000000-0000-0000-0000-000000000000}"/>
+          </ac:spMkLst>
+        </pc:spChg>
+        <pc:spChg chg="mod">
+          <ac:chgData name="Luv rawal" userId="666fe3837bd18505" providerId="LiveId" clId="{304912EA-2BFD-4C77-8C7E-1AF34E9DA1B0}" dt="2026-09-16T05:53:09.528" v="49" actId="255"/>
+          <ac:spMkLst>
+            <pc:docMk/>
+            <pc:sldMk cId="0" sldId="257"/>
+            <ac:spMk id="10" creationId="{00000000-0000-0000-0000-000000000000}"/>
+          </ac:spMkLst>
+        </pc:spChg>
+        <pc:spChg chg="mod">
+          <ac:chgData name="Luv rawal" userId="666fe3837bd18505" providerId="LiveId" clId="{304912EA-2BFD-4C77-8C7E-1AF34E9DA1B0}" dt="2026-09-16T05:53:09.528" v="49" actId="255"/>
+          <ac:spMkLst>
+            <pc:docMk/>
+            <pc:sldMk cId="0" sldId="257"/>
+            <ac:spMk id="11" creationId="{00000000-0000-0000-0000-000000000000}"/>
+          </ac:spMkLst>
+        </pc:spChg>
+        <pc:spChg chg="mod">
+          <ac:chgData name="Luv rawal" userId="666fe3837bd18505" providerId="LiveId" clId="{304912EA-2BFD-4C77-8C7E-1AF34E9DA1B0}" dt="2026-09-16T05:53:22.496" v="53" actId="1076"/>
+          <ac:spMkLst>
+            <pc:docMk/>
+            <pc:sldMk cId="0" sldId="257"/>
+            <ac:spMk id="12" creationId="{00000000-0000-0000-0000-000000000000}"/>
+          </ac:spMkLst>
+        </pc:spChg>
+        <pc:spChg chg="mod">
+          <ac:chgData name="Luv rawal" userId="666fe3837bd18505" providerId="LiveId" clId="{304912EA-2BFD-4C77-8C7E-1AF34E9DA1B0}" dt="2026-09-16T05:53:09.528" v="49" actId="255"/>
+          <ac:spMkLst>
+            <pc:docMk/>
+            <pc:sldMk cId="0" sldId="257"/>
+            <ac:spMk id="13" creationId="{00000000-0000-0000-0000-000000000000}"/>
+          </ac:spMkLst>
+        </pc:spChg>
+        <pc:spChg chg="mod">
+          <ac:chgData name="Luv rawal" userId="666fe3837bd18505" providerId="LiveId" clId="{304912EA-2BFD-4C77-8C7E-1AF34E9DA1B0}" dt="2026-09-16T05:53:09.528" v="49" actId="255"/>
+          <ac:spMkLst>
+            <pc:docMk/>
+            <pc:sldMk cId="0" sldId="257"/>
+            <ac:spMk id="14" creationId="{00000000-0000-0000-0000-000000000000}"/>
+          </ac:spMkLst>
+        </pc:spChg>
+        <pc:spChg chg="mod">
+          <ac:chgData name="Luv rawal" userId="666fe3837bd18505" providerId="LiveId" clId="{304912EA-2BFD-4C77-8C7E-1AF34E9DA1B0}" dt="2026-09-16T05:53:09.528" v="49" actId="255"/>
+          <ac:spMkLst>
+            <pc:docMk/>
+            <pc:sldMk cId="0" sldId="257"/>
+            <ac:spMk id="15" creationId="{00000000-0000-0000-0000-000000000000}"/>
+          </ac:spMkLst>
+        </pc:spChg>
+        <pc:spChg chg="mod">
+          <ac:chgData name="Luv rawal" userId="666fe3837bd18505" providerId="LiveId" clId="{304912EA-2BFD-4C77-8C7E-1AF34E9DA1B0}" dt="2026-09-16T05:53:18.153" v="52" actId="1076"/>
+          <ac:spMkLst>
+            <pc:docMk/>
+            <pc:sldMk cId="0" sldId="257"/>
+            <ac:spMk id="16" creationId="{00000000-0000-0000-0000-000000000000}"/>
+          </ac:spMkLst>
+        </pc:spChg>
+        <pc:spChg chg="mod">
+          <ac:chgData name="Luv rawal" userId="666fe3837bd18505" providerId="LiveId" clId="{304912EA-2BFD-4C77-8C7E-1AF34E9DA1B0}" dt="2026-09-16T05:53:09.528" v="49" actId="255"/>
+          <ac:spMkLst>
+            <pc:docMk/>
+            <pc:sldMk cId="0" sldId="257"/>
+            <ac:spMk id="18" creationId="{00000000-0000-0000-0000-000000000000}"/>
+          </ac:spMkLst>
+        </pc:spChg>
+        <pc:spChg chg="mod">
+          <ac:chgData name="Luv rawal" userId="666fe3837bd18505" providerId="LiveId" clId="{304912EA-2BFD-4C77-8C7E-1AF34E9DA1B0}" dt="2026-09-16T05:53:09.528" v="49" actId="255"/>
+          <ac:spMkLst>
+            <pc:docMk/>
+            <pc:sldMk cId="0" sldId="257"/>
+            <ac:spMk id="19" creationId="{00000000-0000-0000-0000-000000000000}"/>
+          </ac:spMkLst>
+        </pc:spChg>
+        <pc:spChg chg="add mod">
+          <ac:chgData name="Luv rawal" userId="666fe3837bd18505" providerId="LiveId" clId="{304912EA-2BFD-4C77-8C7E-1AF34E9DA1B0}" dt="2026-09-16T05:52:45.946" v="47" actId="571"/>
+          <ac:spMkLst>
+            <pc:docMk/>
+            <pc:sldMk cId="0" sldId="257"/>
+            <ac:spMk id="36" creationId="{3DA4A8F5-C1E0-1F64-83A2-872DD74D9EA9}"/>
+          </ac:spMkLst>
+        </pc:spChg>
+        <pc:spChg chg="add mod">
+          <ac:chgData name="Luv rawal" userId="666fe3837bd18505" providerId="LiveId" clId="{304912EA-2BFD-4C77-8C7E-1AF34E9DA1B0}" dt="2026-09-16T05:52:45.946" v="47" actId="571"/>
+          <ac:spMkLst>
+            <pc:docMk/>
+            <pc:sldMk cId="0" sldId="257"/>
+            <ac:spMk id="37" creationId="{8ADB8E90-5FAD-0564-2837-56B2588D9BC2}"/>
+          </ac:spMkLst>
+        </pc:spChg>
+        <pc:spChg chg="add mod">
+          <ac:chgData name="Luv rawal" userId="666fe3837bd18505" providerId="LiveId" clId="{304912EA-2BFD-4C77-8C7E-1AF34E9DA1B0}" dt="2026-09-16T05:52:45.946" v="47" actId="571"/>
+          <ac:spMkLst>
+            <pc:docMk/>
+            <pc:sldMk cId="0" sldId="257"/>
+            <ac:spMk id="38" creationId="{D7452148-F65B-1C3E-0B0E-AF8F092C8FFB}"/>
+          </ac:spMkLst>
+        </pc:spChg>
+      </pc:sldChg>
+      <pc:sldChg chg="modSp mod">
+        <pc:chgData name="Luv rawal" userId="666fe3837bd18505" providerId="LiveId" clId="{304912EA-2BFD-4C77-8C7E-1AF34E9DA1B0}" dt="2026-09-16T05:50:15.877" v="45" actId="1076"/>
+        <pc:sldMkLst>
+          <pc:docMk/>
+          <pc:sldMk cId="0" sldId="258"/>
+        </pc:sldMkLst>
+        <pc:spChg chg="mod">
+          <ac:chgData name="Luv rawal" userId="666fe3837bd18505" providerId="LiveId" clId="{304912EA-2BFD-4C77-8C7E-1AF34E9DA1B0}" dt="2026-09-16T05:50:00.987" v="42" actId="1076"/>
+          <ac:spMkLst>
+            <pc:docMk/>
+            <pc:sldMk cId="0" sldId="258"/>
+            <ac:spMk id="22" creationId="{00000000-0000-0000-0000-000000000000}"/>
+          </ac:spMkLst>
+        </pc:spChg>
+        <pc:spChg chg="mod">
+          <ac:chgData name="Luv rawal" userId="666fe3837bd18505" providerId="LiveId" clId="{304912EA-2BFD-4C77-8C7E-1AF34E9DA1B0}" dt="2026-09-16T05:49:46.822" v="38" actId="1076"/>
+          <ac:spMkLst>
+            <pc:docMk/>
+            <pc:sldMk cId="0" sldId="258"/>
+            <ac:spMk id="24" creationId="{00000000-0000-0000-0000-000000000000}"/>
+          </ac:spMkLst>
+        </pc:spChg>
+        <pc:spChg chg="mod">
+          <ac:chgData name="Luv rawal" userId="666fe3837bd18505" providerId="LiveId" clId="{304912EA-2BFD-4C77-8C7E-1AF34E9DA1B0}" dt="2026-09-16T05:50:15.877" v="45" actId="1076"/>
+          <ac:spMkLst>
+            <pc:docMk/>
+            <pc:sldMk cId="0" sldId="258"/>
+            <ac:spMk id="25" creationId="{00000000-0000-0000-0000-000000000000}"/>
+          </ac:spMkLst>
+        </pc:spChg>
+        <pc:spChg chg="mod">
+          <ac:chgData name="Luv rawal" userId="666fe3837bd18505" providerId="LiveId" clId="{304912EA-2BFD-4C77-8C7E-1AF34E9DA1B0}" dt="2026-09-16T05:50:11.274" v="44" actId="1076"/>
+          <ac:spMkLst>
+            <pc:docMk/>
+            <pc:sldMk cId="0" sldId="258"/>
+            <ac:spMk id="26" creationId="{00000000-0000-0000-0000-000000000000}"/>
+          </ac:spMkLst>
+        </pc:spChg>
+        <pc:spChg chg="mod">
+          <ac:chgData name="Luv rawal" userId="666fe3837bd18505" providerId="LiveId" clId="{304912EA-2BFD-4C77-8C7E-1AF34E9DA1B0}" dt="2026-09-16T05:50:07.003" v="43" actId="1076"/>
+          <ac:spMkLst>
+            <pc:docMk/>
+            <pc:sldMk cId="0" sldId="258"/>
+            <ac:spMk id="27" creationId="{00000000-0000-0000-0000-000000000000}"/>
+          </ac:spMkLst>
+        </pc:spChg>
+        <pc:spChg chg="mod">
+          <ac:chgData name="Luv rawal" userId="666fe3837bd18505" providerId="LiveId" clId="{304912EA-2BFD-4C77-8C7E-1AF34E9DA1B0}" dt="2026-09-16T05:49:54.552" v="40" actId="1076"/>
+          <ac:spMkLst>
+            <pc:docMk/>
+            <pc:sldMk cId="0" sldId="258"/>
+            <ac:spMk id="28" creationId="{00000000-0000-0000-0000-000000000000}"/>
+          </ac:spMkLst>
+        </pc:spChg>
+        <pc:spChg chg="mod">
+          <ac:chgData name="Luv rawal" userId="666fe3837bd18505" providerId="LiveId" clId="{304912EA-2BFD-4C77-8C7E-1AF34E9DA1B0}" dt="2026-09-16T05:49:50.472" v="39" actId="1076"/>
+          <ac:spMkLst>
+            <pc:docMk/>
+            <pc:sldMk cId="0" sldId="258"/>
+            <ac:spMk id="29" creationId="{00000000-0000-0000-0000-000000000000}"/>
+          </ac:spMkLst>
+        </pc:spChg>
+      </pc:sldChg>
+      <pc:sldChg chg="addSp delSp modSp mod">
+        <pc:chgData name="Luv rawal" userId="666fe3837bd18505" providerId="LiveId" clId="{304912EA-2BFD-4C77-8C7E-1AF34E9DA1B0}" dt="2026-09-16T05:54:32.034" v="57" actId="1076"/>
+        <pc:sldMkLst>
+          <pc:docMk/>
+          <pc:sldMk cId="540050447" sldId="263"/>
+        </pc:sldMkLst>
+        <pc:spChg chg="add mod">
+          <ac:chgData name="Luv rawal" userId="666fe3837bd18505" providerId="LiveId" clId="{304912EA-2BFD-4C77-8C7E-1AF34E9DA1B0}" dt="2026-09-16T05:54:32.034" v="57" actId="1076"/>
+          <ac:spMkLst>
+            <pc:docMk/>
+            <pc:sldMk cId="540050447" sldId="263"/>
+            <ac:spMk id="3" creationId="{14428D4D-6AD5-CB31-B11E-4C7CCA5AA473}"/>
+          </ac:spMkLst>
+        </pc:spChg>
+        <pc:spChg chg="add del">
+          <ac:chgData name="Luv rawal" userId="666fe3837bd18505" providerId="LiveId" clId="{304912EA-2BFD-4C77-8C7E-1AF34E9DA1B0}" dt="2026-09-16T05:44:05.182" v="28" actId="22"/>
+          <ac:spMkLst>
+            <pc:docMk/>
+            <pc:sldMk cId="540050447" sldId="263"/>
+            <ac:spMk id="5" creationId="{88CBE315-9585-B412-69AC-590803430EEF}"/>
+          </ac:spMkLst>
+        </pc:spChg>
+        <pc:spChg chg="mod">
+          <ac:chgData name="Luv rawal" userId="666fe3837bd18505" providerId="LiveId" clId="{304912EA-2BFD-4C77-8C7E-1AF34E9DA1B0}" dt="2026-09-16T05:44:43.663" v="36" actId="20577"/>
+          <ac:spMkLst>
+            <pc:docMk/>
+            <pc:sldMk cId="540050447" sldId="263"/>
+            <ac:spMk id="7" creationId="{EFA32A8E-159F-1816-D025-54F3BBA8158D}"/>
+          </ac:spMkLst>
+        </pc:spChg>
+        <pc:spChg chg="mod">
+          <ac:chgData name="Luv rawal" userId="666fe3837bd18505" providerId="LiveId" clId="{304912EA-2BFD-4C77-8C7E-1AF34E9DA1B0}" dt="2026-09-16T05:54:26.042" v="56" actId="1076"/>
+          <ac:spMkLst>
+            <pc:docMk/>
+            <pc:sldMk cId="540050447" sldId="263"/>
+            <ac:spMk id="11" creationId="{C62ED377-D67F-E743-4A04-13CAC7FE450A}"/>
+          </ac:spMkLst>
+        </pc:spChg>
+        <pc:spChg chg="mod">
+          <ac:chgData name="Luv rawal" userId="666fe3837bd18505" providerId="LiveId" clId="{304912EA-2BFD-4C77-8C7E-1AF34E9DA1B0}" dt="2026-09-16T05:54:26.042" v="56" actId="1076"/>
+          <ac:spMkLst>
+            <pc:docMk/>
+            <pc:sldMk cId="540050447" sldId="263"/>
+            <ac:spMk id="12" creationId="{3D0DCA5E-57A5-E9EB-3C12-8C2CE2A33031}"/>
+          </ac:spMkLst>
+        </pc:spChg>
+        <pc:spChg chg="mod">
+          <ac:chgData name="Luv rawal" userId="666fe3837bd18505" providerId="LiveId" clId="{304912EA-2BFD-4C77-8C7E-1AF34E9DA1B0}" dt="2026-09-16T05:54:26.042" v="56" actId="1076"/>
+          <ac:spMkLst>
+            <pc:docMk/>
+            <pc:sldMk cId="540050447" sldId="263"/>
+            <ac:spMk id="13" creationId="{60520609-3A9A-9951-32A0-89707B0EADCA}"/>
+          </ac:spMkLst>
+        </pc:spChg>
+        <pc:spChg chg="mod">
+          <ac:chgData name="Luv rawal" userId="666fe3837bd18505" providerId="LiveId" clId="{304912EA-2BFD-4C77-8C7E-1AF34E9DA1B0}" dt="2026-09-16T05:54:26.042" v="56" actId="1076"/>
+          <ac:spMkLst>
+            <pc:docMk/>
+            <pc:sldMk cId="540050447" sldId="263"/>
+            <ac:spMk id="14" creationId="{1A36C1B7-1F66-7FCD-ABD7-05EF021783B0}"/>
+          </ac:spMkLst>
+        </pc:spChg>
+        <pc:spChg chg="mod">
+          <ac:chgData name="Luv rawal" userId="666fe3837bd18505" providerId="LiveId" clId="{304912EA-2BFD-4C77-8C7E-1AF34E9DA1B0}" dt="2026-09-16T05:54:26.042" v="56" actId="1076"/>
+          <ac:spMkLst>
+            <pc:docMk/>
+            <pc:sldMk cId="540050447" sldId="263"/>
+            <ac:spMk id="15" creationId="{0DECC320-5ED6-E89C-FA66-69E8A99445A7}"/>
+          </ac:spMkLst>
+        </pc:spChg>
+        <pc:spChg chg="mod">
+          <ac:chgData name="Luv rawal" userId="666fe3837bd18505" providerId="LiveId" clId="{304912EA-2BFD-4C77-8C7E-1AF34E9DA1B0}" dt="2026-09-16T05:54:26.042" v="56" actId="1076"/>
+          <ac:spMkLst>
+            <pc:docMk/>
+            <pc:sldMk cId="540050447" sldId="263"/>
+            <ac:spMk id="16" creationId="{E7DF5EFF-72C6-89D0-DF50-0AA4EA486B21}"/>
+          </ac:spMkLst>
+        </pc:spChg>
+        <pc:spChg chg="mod">
+          <ac:chgData name="Luv rawal" userId="666fe3837bd18505" providerId="LiveId" clId="{304912EA-2BFD-4C77-8C7E-1AF34E9DA1B0}" dt="2026-09-16T05:54:26.042" v="56" actId="1076"/>
+          <ac:spMkLst>
+            <pc:docMk/>
+            <pc:sldMk cId="540050447" sldId="263"/>
+            <ac:spMk id="17" creationId="{0CFA8AED-26BE-9304-642D-AE4F70E2848D}"/>
+          </ac:spMkLst>
+        </pc:spChg>
+        <pc:spChg chg="mod">
+          <ac:chgData name="Luv rawal" userId="666fe3837bd18505" providerId="LiveId" clId="{304912EA-2BFD-4C77-8C7E-1AF34E9DA1B0}" dt="2026-09-16T05:54:26.042" v="56" actId="1076"/>
+          <ac:spMkLst>
+            <pc:docMk/>
+            <pc:sldMk cId="540050447" sldId="263"/>
+            <ac:spMk id="18" creationId="{08EDA010-CABA-C0A8-D177-EB9AC618FD67}"/>
+          </ac:spMkLst>
+        </pc:spChg>
+        <pc:spChg chg="mod">
+          <ac:chgData name="Luv rawal" userId="666fe3837bd18505" providerId="LiveId" clId="{304912EA-2BFD-4C77-8C7E-1AF34E9DA1B0}" dt="2026-09-16T05:54:26.042" v="56" actId="1076"/>
+          <ac:spMkLst>
+            <pc:docMk/>
+            <pc:sldMk cId="540050447" sldId="263"/>
+            <ac:spMk id="19" creationId="{C375255C-AF85-403B-9552-BAB7EFFFD6D7}"/>
+          </ac:spMkLst>
+        </pc:spChg>
+      </pc:sldChg>
+    </pc:docChg>
+  </pc:docChgLst>
+</pc:chgInfo>
 </file>
 
 <file path=ppt/notesMasters/notesMaster1.xml><?xml version="1.0" encoding="utf-8"?>
@@ -1324,7 +1726,7 @@
         </p:nvSpPr>
         <p:spPr>
           <a:xfrm>
-            <a:off x="3861007" y="3086100"/>
+            <a:off x="1698794" y="3034222"/>
             <a:ext cx="7772400" cy="411480"/>
           </a:xfrm>
           <a:prstGeom prst="rect">
@@ -1337,21 +1739,19 @@
           <a:bodyPr wrap="square" lIns="0" tIns="0" rIns="0" bIns="0" rtlCol="0" anchor="ctr"/>
           <a:lstStyle/>
           <a:p>
-            <a:pPr marL="0" indent="0">
-              <a:buNone/>
-            </a:pPr>
-            <a:r>
-              <a:rPr lang="en-US" sz="1700" i="1" dirty="0">
-                <a:solidFill>
-                  <a:srgbClr val="F59E0B"/>
-                </a:solidFill>
-                <a:latin typeface="Calibri" pitchFamily="34" charset="0"/>
-                <a:ea typeface="Calibri" pitchFamily="34" charset="-122"/>
-                <a:cs typeface="Calibri" pitchFamily="34" charset="-120"/>
-              </a:rPr>
-              <a:t>One URL. Complete Security Insight.</a:t>
-            </a:r>
-            <a:endParaRPr lang="en-US" sz="1700" dirty="0"/>
+            <a:r>
+              <a:rPr lang="en-IN" sz="1600" dirty="0">
+                <a:solidFill>
+                  <a:schemeClr val="accent4"/>
+                </a:solidFill>
+              </a:rPr>
+              <a:t>One URL in. A prioritized, fixable security report out. In minutes, not weeks, without needing a security team.</a:t>
+            </a:r>
+            <a:endParaRPr lang="en-US" sz="1700" dirty="0">
+              <a:solidFill>
+                <a:schemeClr val="accent4"/>
+              </a:solidFill>
+            </a:endParaRPr>
           </a:p>
         </p:txBody>
       </p:sp>
@@ -1363,7 +1763,7 @@
         </p:nvSpPr>
         <p:spPr>
           <a:xfrm>
-            <a:off x="3469122" y="3544699"/>
+            <a:off x="3823685" y="3544699"/>
             <a:ext cx="4023360" cy="365760"/>
           </a:xfrm>
           <a:prstGeom prst="rect">
@@ -1425,7 +1825,7 @@
               <a:buNone/>
             </a:pPr>
             <a:r>
-              <a:rPr lang="en-US" sz="1700" i="1" dirty="0">
+              <a:rPr lang="en-US" sz="2400" i="1" dirty="0">
                 <a:solidFill>
                   <a:srgbClr val="F59E0B"/>
                 </a:solidFill>
@@ -1435,7 +1835,7 @@
               </a:rPr>
               <a:t>Problem Statement</a:t>
             </a:r>
-            <a:endParaRPr lang="en-US" sz="1700" dirty="0"/>
+            <a:endParaRPr lang="en-US" sz="2400" dirty="0"/>
           </a:p>
         </p:txBody>
       </p:sp>
@@ -1470,7 +1870,7 @@
               <a:buNone/>
             </a:pPr>
             <a:r>
-              <a:rPr lang="en-US" sz="1700" i="1" dirty="0">
+              <a:rPr lang="en-US" sz="2400" i="1" dirty="0">
                 <a:solidFill>
                   <a:srgbClr val="F59E0B"/>
                 </a:solidFill>
@@ -1480,7 +1880,7 @@
               </a:rPr>
               <a:t>Posted by</a:t>
             </a:r>
-            <a:endParaRPr lang="en-US" sz="1700" dirty="0"/>
+            <a:endParaRPr lang="en-US" sz="2400" dirty="0"/>
           </a:p>
         </p:txBody>
       </p:sp>
@@ -1515,7 +1915,7 @@
               <a:buNone/>
             </a:pPr>
             <a:r>
-              <a:rPr lang="en-US" sz="1700" i="1" dirty="0">
+              <a:rPr lang="en-US" sz="2400" i="1" dirty="0">
                 <a:solidFill>
                   <a:srgbClr val="F59E0B"/>
                 </a:solidFill>
@@ -1525,7 +1925,7 @@
               </a:rPr>
               <a:t>Team</a:t>
             </a:r>
-            <a:endParaRPr lang="en-US" sz="1700" dirty="0"/>
+            <a:endParaRPr lang="en-US" sz="2400" dirty="0"/>
           </a:p>
         </p:txBody>
       </p:sp>
@@ -1560,7 +1960,7 @@
               <a:buNone/>
             </a:pPr>
             <a:r>
-              <a:rPr lang="en-US" sz="1300" dirty="0">
+              <a:rPr lang="en-US" sz="1600" dirty="0">
                 <a:solidFill>
                   <a:srgbClr val="B9C7D3"/>
                 </a:solidFill>
@@ -1570,7 +1970,7 @@
               </a:rPr>
               <a:t>Website Scanning tool</a:t>
             </a:r>
-            <a:endParaRPr lang="en-US" sz="1300" dirty="0"/>
+            <a:endParaRPr lang="en-US" sz="1600" dirty="0"/>
           </a:p>
         </p:txBody>
       </p:sp>
@@ -1605,7 +2005,7 @@
               <a:buNone/>
             </a:pPr>
             <a:r>
-              <a:rPr lang="en-US" sz="1300" dirty="0" err="1">
+              <a:rPr lang="en-US" sz="1600" dirty="0" err="1">
                 <a:solidFill>
                   <a:srgbClr val="B9C7D3"/>
                 </a:solidFill>
@@ -1615,7 +2015,7 @@
               </a:rPr>
               <a:t>Uplers</a:t>
             </a:r>
-            <a:endParaRPr lang="en-US" sz="1300" dirty="0"/>
+            <a:endParaRPr lang="en-US" sz="1600" dirty="0"/>
           </a:p>
         </p:txBody>
       </p:sp>
@@ -1650,7 +2050,7 @@
               <a:buNone/>
             </a:pPr>
             <a:r>
-              <a:rPr lang="en-US" sz="1300" dirty="0">
+              <a:rPr lang="en-US" sz="1600" dirty="0">
                 <a:solidFill>
                   <a:srgbClr val="B9C7D3"/>
                 </a:solidFill>
@@ -1658,25 +2058,9 @@
                 <a:ea typeface="Calibri" pitchFamily="34" charset="-122"/>
                 <a:cs typeface="Calibri" pitchFamily="34" charset="-120"/>
               </a:rPr>
-              <a:t>Luv Rawal,</a:t>
-            </a:r>
-          </a:p>
-          <a:p>
-            <a:pPr marL="0" indent="0">
-              <a:buNone/>
-            </a:pPr>
-            <a:r>
-              <a:rPr lang="en-US" sz="1300" dirty="0">
-                <a:solidFill>
-                  <a:srgbClr val="B9C7D3"/>
-                </a:solidFill>
-                <a:latin typeface="Calibri" pitchFamily="34" charset="0"/>
-                <a:ea typeface="Calibri" pitchFamily="34" charset="-122"/>
-                <a:cs typeface="Calibri" pitchFamily="34" charset="-120"/>
-              </a:rPr>
-              <a:t>Divyanshu Rawat</a:t>
-            </a:r>
-            <a:endParaRPr lang="en-US" sz="1300" dirty="0"/>
+              <a:t>Luv Rawal</a:t>
+            </a:r>
+            <a:endParaRPr lang="en-US" sz="1600" dirty="0"/>
           </a:p>
         </p:txBody>
       </p:sp>
@@ -1970,7 +2354,7 @@
         </p:nvSpPr>
         <p:spPr>
           <a:xfrm>
-            <a:off x="7315200" y="2377440"/>
+            <a:off x="7315200" y="1932296"/>
             <a:ext cx="4297680" cy="3749040"/>
           </a:xfrm>
           <a:prstGeom prst="rect">
@@ -2001,7 +2385,7 @@
         </p:nvSpPr>
         <p:spPr>
           <a:xfrm>
-            <a:off x="7635240" y="2606040"/>
+            <a:off x="7635240" y="2160896"/>
             <a:ext cx="1554480" cy="685800"/>
           </a:xfrm>
           <a:prstGeom prst="rect">
@@ -2046,7 +2430,7 @@
         </p:nvSpPr>
         <p:spPr>
           <a:xfrm>
-            <a:off x="9098280" y="2624328"/>
+            <a:off x="9098280" y="2179184"/>
             <a:ext cx="2240280" cy="685800"/>
           </a:xfrm>
           <a:prstGeom prst="rect">
@@ -2091,7 +2475,7 @@
         </p:nvSpPr>
         <p:spPr>
           <a:xfrm>
-            <a:off x="7635240" y="3502152"/>
+            <a:off x="7635240" y="3057008"/>
             <a:ext cx="1554480" cy="685800"/>
           </a:xfrm>
           <a:prstGeom prst="rect">
@@ -2136,7 +2520,7 @@
         </p:nvSpPr>
         <p:spPr>
           <a:xfrm>
-            <a:off x="9098280" y="3520440"/>
+            <a:off x="9098280" y="3075296"/>
             <a:ext cx="2240280" cy="685800"/>
           </a:xfrm>
           <a:prstGeom prst="rect">
@@ -2181,7 +2565,7 @@
         </p:nvSpPr>
         <p:spPr>
           <a:xfrm>
-            <a:off x="7635240" y="4398264"/>
+            <a:off x="7635240" y="3953120"/>
             <a:ext cx="1554480" cy="685800"/>
           </a:xfrm>
           <a:prstGeom prst="rect">
@@ -2226,7 +2610,7 @@
         </p:nvSpPr>
         <p:spPr>
           <a:xfrm>
-            <a:off x="9098280" y="4416552"/>
+            <a:off x="9098280" y="3971408"/>
             <a:ext cx="2240280" cy="685800"/>
           </a:xfrm>
           <a:prstGeom prst="rect">
@@ -2271,7 +2655,7 @@
         </p:nvSpPr>
         <p:spPr>
           <a:xfrm>
-            <a:off x="7635240" y="5294376"/>
+            <a:off x="7635240" y="4849232"/>
             <a:ext cx="1554480" cy="685800"/>
           </a:xfrm>
           <a:prstGeom prst="rect">
@@ -2316,7 +2700,7 @@
         </p:nvSpPr>
         <p:spPr>
           <a:xfrm>
-            <a:off x="9098280" y="5312664"/>
+            <a:off x="9098280" y="4867520"/>
             <a:ext cx="2240280" cy="685800"/>
           </a:xfrm>
           <a:prstGeom prst="rect">
@@ -2344,6 +2728,53 @@
               <a:t>breaches traced to unpatched components</a:t>
             </a:r>
             <a:endParaRPr lang="en-US" sz="1150" dirty="0"/>
+          </a:p>
+        </p:txBody>
+      </p:sp>
+      <p:sp>
+        <p:nvSpPr>
+          <p:cNvPr id="3" name="Text 17">
+            <a:extLst>
+              <a:ext uri="{FF2B5EF4-FFF2-40B4-BE49-F238E27FC236}">
+                <a16:creationId xmlns:a16="http://schemas.microsoft.com/office/drawing/2014/main" id="{14428D4D-6AD5-CB31-B11E-4C7CCA5AA473}"/>
+              </a:ext>
+            </a:extLst>
+          </p:cNvPr>
+          <p:cNvSpPr txBox="1"/>
+          <p:nvPr/>
+        </p:nvSpPr>
+        <p:spPr>
+          <a:xfrm>
+            <a:off x="7795260" y="5891648"/>
+            <a:ext cx="3337560" cy="685800"/>
+          </a:xfrm>
+          <a:prstGeom prst="rect">
+            <a:avLst/>
+          </a:prstGeom>
+          <a:noFill/>
+          <a:ln/>
+        </p:spPr>
+        <p:txBody>
+          <a:bodyPr wrap="square" lIns="0" tIns="0" rIns="0" bIns="0" rtlCol="0" anchor="ctr"/>
+          <a:lstStyle/>
+          <a:p>
+            <a:r>
+              <a:rPr lang="en-IN" sz="1400" dirty="0">
+                <a:solidFill>
+                  <a:schemeClr val="bg1">
+                    <a:lumMod val="85000"/>
+                  </a:schemeClr>
+                </a:solidFill>
+              </a:rPr>
+              <a:t>from published 2025 industry breach-cost and threat-intelligence reports</a:t>
+            </a:r>
+            <a:endParaRPr lang="en-US" sz="1200" dirty="0">
+              <a:solidFill>
+                <a:schemeClr val="bg1">
+                  <a:lumMod val="85000"/>
+                </a:schemeClr>
+              </a:solidFill>
+            </a:endParaRPr>
           </a:p>
         </p:txBody>
       </p:sp>
@@ -2471,7 +2902,7 @@
         </p:nvSpPr>
         <p:spPr>
           <a:xfrm>
-            <a:off x="548640" y="1527048"/>
+            <a:off x="510073" y="1835984"/>
             <a:ext cx="329184" cy="329184"/>
           </a:xfrm>
           <a:prstGeom prst="ellipse">
@@ -2491,7 +2922,7 @@
         </p:nvSpPr>
         <p:spPr>
           <a:xfrm>
-            <a:off x="548640" y="1527048"/>
+            <a:off x="502920" y="1852313"/>
             <a:ext cx="329184" cy="329184"/>
           </a:xfrm>
           <a:prstGeom prst="rect">
@@ -2508,7 +2939,7 @@
               <a:buNone/>
             </a:pPr>
             <a:r>
-              <a:rPr lang="en-US" sz="1400" b="1" dirty="0">
+              <a:rPr lang="en-US" sz="1600" b="1" dirty="0">
                 <a:solidFill>
                   <a:srgbClr val="FFFFFF"/>
                 </a:solidFill>
@@ -2518,7 +2949,7 @@
               </a:rPr>
               <a:t>1</a:t>
             </a:r>
-            <a:endParaRPr lang="en-US" sz="1400" dirty="0"/>
+            <a:endParaRPr lang="en-US" sz="1600" dirty="0"/>
           </a:p>
         </p:txBody>
       </p:sp>
@@ -2530,7 +2961,7 @@
         </p:nvSpPr>
         <p:spPr>
           <a:xfrm>
-            <a:off x="1051560" y="1453896"/>
+            <a:off x="1005840" y="1779161"/>
             <a:ext cx="5029200" cy="292608"/>
           </a:xfrm>
           <a:prstGeom prst="rect">
@@ -2547,7 +2978,7 @@
               <a:buNone/>
             </a:pPr>
             <a:r>
-              <a:rPr lang="en-US" sz="1450" b="1" dirty="0">
+              <a:rPr lang="en-US" sz="1600" b="1" dirty="0">
                 <a:solidFill>
                   <a:srgbClr val="2D2D2D"/>
                 </a:solidFill>
@@ -2557,7 +2988,7 @@
               </a:rPr>
               <a:t>One Unified Report</a:t>
             </a:r>
-            <a:endParaRPr lang="en-US" sz="1450" dirty="0"/>
+            <a:endParaRPr lang="en-US" sz="1600" dirty="0"/>
           </a:p>
         </p:txBody>
       </p:sp>
@@ -2569,7 +3000,7 @@
         </p:nvSpPr>
         <p:spPr>
           <a:xfrm>
-            <a:off x="1051560" y="1737360"/>
+            <a:off x="1005840" y="2062625"/>
             <a:ext cx="5074920" cy="548640"/>
           </a:xfrm>
           <a:prstGeom prst="rect">
@@ -2589,7 +3020,7 @@
               <a:buNone/>
             </a:pPr>
             <a:r>
-              <a:rPr lang="en-US" sz="1150" dirty="0">
+              <a:rPr lang="en-US" sz="1600" dirty="0">
                 <a:solidFill>
                   <a:srgbClr val="6B7280"/>
                 </a:solidFill>
@@ -2599,7 +3030,7 @@
               </a:rPr>
               <a:t>Outdated-component detection AND OWASP Top 10 in a single scan. Most tools do only one.</a:t>
             </a:r>
-            <a:endParaRPr lang="en-US" sz="1150" dirty="0"/>
+            <a:endParaRPr lang="en-US" sz="1600" dirty="0"/>
           </a:p>
         </p:txBody>
       </p:sp>
@@ -2611,7 +3042,7 @@
         </p:nvSpPr>
         <p:spPr>
           <a:xfrm>
-            <a:off x="548640" y="2551176"/>
+            <a:off x="487680" y="2876441"/>
             <a:ext cx="329184" cy="329184"/>
           </a:xfrm>
           <a:prstGeom prst="ellipse">
@@ -2631,7 +3062,7 @@
         </p:nvSpPr>
         <p:spPr>
           <a:xfrm>
-            <a:off x="548640" y="2551176"/>
+            <a:off x="502920" y="2876441"/>
             <a:ext cx="329184" cy="329184"/>
           </a:xfrm>
           <a:prstGeom prst="rect">
@@ -2648,7 +3079,7 @@
               <a:buNone/>
             </a:pPr>
             <a:r>
-              <a:rPr lang="en-US" sz="1400" b="1" dirty="0">
+              <a:rPr lang="en-US" sz="1600" b="1" dirty="0">
                 <a:solidFill>
                   <a:srgbClr val="FFFFFF"/>
                 </a:solidFill>
@@ -2658,7 +3089,7 @@
               </a:rPr>
               <a:t>2</a:t>
             </a:r>
-            <a:endParaRPr lang="en-US" sz="1400" dirty="0"/>
+            <a:endParaRPr lang="en-US" sz="1600" dirty="0"/>
           </a:p>
         </p:txBody>
       </p:sp>
@@ -2670,7 +3101,7 @@
         </p:nvSpPr>
         <p:spPr>
           <a:xfrm>
-            <a:off x="1051560" y="2478024"/>
+            <a:off x="1005840" y="2803289"/>
             <a:ext cx="5029200" cy="292608"/>
           </a:xfrm>
           <a:prstGeom prst="rect">
@@ -2687,7 +3118,7 @@
               <a:buNone/>
             </a:pPr>
             <a:r>
-              <a:rPr lang="en-US" sz="1450" b="1" dirty="0">
+              <a:rPr lang="en-US" sz="1600" b="1" dirty="0">
                 <a:solidFill>
                   <a:srgbClr val="2D2D2D"/>
                 </a:solidFill>
@@ -2697,7 +3128,7 @@
               </a:rPr>
               <a:t>Fixes, Not a CVE Dump</a:t>
             </a:r>
-            <a:endParaRPr lang="en-US" sz="1450" dirty="0"/>
+            <a:endParaRPr lang="en-US" sz="1600" dirty="0"/>
           </a:p>
         </p:txBody>
       </p:sp>
@@ -2709,7 +3140,7 @@
         </p:nvSpPr>
         <p:spPr>
           <a:xfrm>
-            <a:off x="1051560" y="2761488"/>
+            <a:off x="1005840" y="3086753"/>
             <a:ext cx="5074920" cy="548640"/>
           </a:xfrm>
           <a:prstGeom prst="rect">
@@ -2729,7 +3160,7 @@
               <a:buNone/>
             </a:pPr>
             <a:r>
-              <a:rPr lang="en-US" sz="1150" dirty="0">
+              <a:rPr lang="en-US" sz="1600" dirty="0">
                 <a:solidFill>
                   <a:srgbClr val="6B7280"/>
                 </a:solidFill>
@@ -2739,7 +3170,7 @@
               </a:rPr>
               <a:t>Plain-language remediation that developers can act on without security background.</a:t>
             </a:r>
-            <a:endParaRPr lang="en-US" sz="1150" dirty="0"/>
+            <a:endParaRPr lang="en-US" sz="1600" dirty="0"/>
           </a:p>
         </p:txBody>
       </p:sp>
@@ -2751,7 +3182,7 @@
         </p:nvSpPr>
         <p:spPr>
           <a:xfrm>
-            <a:off x="548640" y="3575304"/>
+            <a:off x="502920" y="3890492"/>
             <a:ext cx="329184" cy="329184"/>
           </a:xfrm>
           <a:prstGeom prst="ellipse">
@@ -2771,7 +3202,7 @@
         </p:nvSpPr>
         <p:spPr>
           <a:xfrm>
-            <a:off x="548640" y="3575304"/>
+            <a:off x="502920" y="3900569"/>
             <a:ext cx="329184" cy="329184"/>
           </a:xfrm>
           <a:prstGeom prst="rect">
@@ -2788,7 +3219,7 @@
               <a:buNone/>
             </a:pPr>
             <a:r>
-              <a:rPr lang="en-US" sz="1400" b="1" dirty="0">
+              <a:rPr lang="en-US" sz="1600" b="1" dirty="0">
                 <a:solidFill>
                   <a:srgbClr val="FFFFFF"/>
                 </a:solidFill>
@@ -2798,7 +3229,7 @@
               </a:rPr>
               <a:t>3</a:t>
             </a:r>
-            <a:endParaRPr lang="en-US" sz="1400" dirty="0"/>
+            <a:endParaRPr lang="en-US" sz="1600" dirty="0"/>
           </a:p>
         </p:txBody>
       </p:sp>
@@ -2810,7 +3241,7 @@
         </p:nvSpPr>
         <p:spPr>
           <a:xfrm>
-            <a:off x="1051560" y="3502152"/>
+            <a:off x="1005840" y="3827417"/>
             <a:ext cx="5029200" cy="292608"/>
           </a:xfrm>
           <a:prstGeom prst="rect">
@@ -2827,7 +3258,7 @@
               <a:buNone/>
             </a:pPr>
             <a:r>
-              <a:rPr lang="en-US" sz="1450" b="1" dirty="0">
+              <a:rPr lang="en-US" sz="1600" b="1" dirty="0">
                 <a:solidFill>
                   <a:srgbClr val="2D2D2D"/>
                 </a:solidFill>
@@ -2837,7 +3268,7 @@
               </a:rPr>
               <a:t>Prioritization That Means Something</a:t>
             </a:r>
-            <a:endParaRPr lang="en-US" sz="1450" dirty="0"/>
+            <a:endParaRPr lang="en-US" sz="1600" dirty="0"/>
           </a:p>
         </p:txBody>
       </p:sp>
@@ -2849,7 +3280,7 @@
         </p:nvSpPr>
         <p:spPr>
           <a:xfrm>
-            <a:off x="1051560" y="3785616"/>
+            <a:off x="1005840" y="4110881"/>
             <a:ext cx="5074920" cy="548640"/>
           </a:xfrm>
           <a:prstGeom prst="rect">
@@ -2869,7 +3300,7 @@
               <a:buNone/>
             </a:pPr>
             <a:r>
-              <a:rPr lang="en-US" sz="1150" dirty="0">
+              <a:rPr lang="en-US" sz="1600" dirty="0">
                 <a:solidFill>
                   <a:srgbClr val="6B7280"/>
                 </a:solidFill>
@@ -2879,7 +3310,7 @@
               </a:rPr>
               <a:t>CVSS severity scoring + business context. Know what to fix first.</a:t>
             </a:r>
-            <a:endParaRPr lang="en-US" sz="1150" dirty="0"/>
+            <a:endParaRPr lang="en-US" sz="1600" dirty="0"/>
           </a:p>
         </p:txBody>
       </p:sp>
@@ -2891,7 +3322,7 @@
         </p:nvSpPr>
         <p:spPr>
           <a:xfrm>
-            <a:off x="548640" y="4599432"/>
+            <a:off x="521208" y="4924697"/>
             <a:ext cx="329184" cy="329184"/>
           </a:xfrm>
           <a:prstGeom prst="ellipse">
@@ -2911,7 +3342,7 @@
         </p:nvSpPr>
         <p:spPr>
           <a:xfrm>
-            <a:off x="548640" y="4599432"/>
+            <a:off x="502920" y="4924697"/>
             <a:ext cx="329184" cy="329184"/>
           </a:xfrm>
           <a:prstGeom prst="rect">
@@ -2928,7 +3359,7 @@
               <a:buNone/>
             </a:pPr>
             <a:r>
-              <a:rPr lang="en-US" sz="1400" b="1" dirty="0">
+              <a:rPr lang="en-US" sz="1600" b="1" dirty="0">
                 <a:solidFill>
                   <a:srgbClr val="FFFFFF"/>
                 </a:solidFill>
@@ -2938,7 +3369,7 @@
               </a:rPr>
               <a:t>4</a:t>
             </a:r>
-            <a:endParaRPr lang="en-US" sz="1400" dirty="0"/>
+            <a:endParaRPr lang="en-US" sz="1600" dirty="0"/>
           </a:p>
         </p:txBody>
       </p:sp>
@@ -2950,7 +3381,7 @@
         </p:nvSpPr>
         <p:spPr>
           <a:xfrm>
-            <a:off x="1051560" y="4526280"/>
+            <a:off x="1005840" y="4851545"/>
             <a:ext cx="5029200" cy="292608"/>
           </a:xfrm>
           <a:prstGeom prst="rect">
@@ -2967,7 +3398,7 @@
               <a:buNone/>
             </a:pPr>
             <a:r>
-              <a:rPr lang="en-US" sz="1450" b="1" dirty="0">
+              <a:rPr lang="en-US" sz="1600" b="1" dirty="0">
                 <a:solidFill>
                   <a:srgbClr val="2D2D2D"/>
                 </a:solidFill>
@@ -2977,7 +3408,7 @@
               </a:rPr>
               <a:t>Minutes, Not Weeks</a:t>
             </a:r>
-            <a:endParaRPr lang="en-US" sz="1450" dirty="0"/>
+            <a:endParaRPr lang="en-US" sz="1600" dirty="0"/>
           </a:p>
         </p:txBody>
       </p:sp>
@@ -2989,7 +3420,7 @@
         </p:nvSpPr>
         <p:spPr>
           <a:xfrm>
-            <a:off x="1051560" y="4809744"/>
+            <a:off x="1005840" y="5135009"/>
             <a:ext cx="5074920" cy="548640"/>
           </a:xfrm>
           <a:prstGeom prst="rect">
@@ -3009,7 +3440,7 @@
               <a:buNone/>
             </a:pPr>
             <a:r>
-              <a:rPr lang="en-US" sz="1150" dirty="0">
+              <a:rPr lang="en-US" sz="1600" dirty="0">
                 <a:solidFill>
                   <a:srgbClr val="6B7280"/>
                 </a:solidFill>
@@ -3019,7 +3450,7 @@
               </a:rPr>
               <a:t>Full scan and shareable report in minutes — no security expertise required.</a:t>
             </a:r>
-            <a:endParaRPr lang="en-US" sz="1150" dirty="0"/>
+            <a:endParaRPr lang="en-US" sz="1600" dirty="0"/>
           </a:p>
         </p:txBody>
       </p:sp>
@@ -4404,7 +4835,7 @@
         </p:nvSpPr>
         <p:spPr>
           <a:xfrm>
-            <a:off x="6583680" y="1965960"/>
+            <a:off x="6583680" y="2131485"/>
             <a:ext cx="4754880" cy="274320"/>
           </a:xfrm>
           <a:prstGeom prst="rect">
@@ -4421,7 +4852,7 @@
               <a:buNone/>
             </a:pPr>
             <a:r>
-              <a:rPr lang="en-US" sz="1250" b="1" dirty="0">
+              <a:rPr lang="en-US" sz="1400" b="1" dirty="0">
                 <a:solidFill>
                   <a:srgbClr val="FFFFFF"/>
                 </a:solidFill>
@@ -4431,7 +4862,7 @@
               </a:rPr>
               <a:t>INPUT</a:t>
             </a:r>
-            <a:endParaRPr lang="en-US" sz="1250" dirty="0"/>
+            <a:endParaRPr lang="en-US" sz="1400" dirty="0"/>
           </a:p>
         </p:txBody>
       </p:sp>
@@ -4443,7 +4874,7 @@
         </p:nvSpPr>
         <p:spPr>
           <a:xfrm>
-            <a:off x="6766560" y="2258568"/>
+            <a:off x="6766560" y="2350008"/>
             <a:ext cx="4572000" cy="457200"/>
           </a:xfrm>
           <a:prstGeom prst="rect">
@@ -4464,7 +4895,7 @@
               <a:buChar char="•"/>
             </a:pPr>
             <a:r>
-              <a:rPr lang="en-US" sz="1100" dirty="0">
+              <a:rPr lang="en-US" sz="1400" dirty="0">
                 <a:solidFill>
                   <a:srgbClr val="D6DEE5"/>
                 </a:solidFill>
@@ -4474,7 +4905,7 @@
               </a:rPr>
               <a:t>A single website URL submitted through the portal</a:t>
             </a:r>
-            <a:endParaRPr lang="en-US" sz="1100" dirty="0"/>
+            <a:endParaRPr lang="en-US" sz="1400" dirty="0"/>
           </a:p>
         </p:txBody>
       </p:sp>
@@ -4486,7 +4917,7 @@
         </p:nvSpPr>
         <p:spPr>
           <a:xfrm>
-            <a:off x="6583680" y="2606040"/>
+            <a:off x="6583680" y="2820924"/>
             <a:ext cx="4754880" cy="274320"/>
           </a:xfrm>
           <a:prstGeom prst="rect">
@@ -4503,7 +4934,7 @@
               <a:buNone/>
             </a:pPr>
             <a:r>
-              <a:rPr lang="en-US" sz="1250" b="1" dirty="0">
+              <a:rPr lang="en-US" sz="1400" b="1" dirty="0">
                 <a:solidFill>
                   <a:srgbClr val="FFFFFF"/>
                 </a:solidFill>
@@ -4513,7 +4944,7 @@
               </a:rPr>
               <a:t>OUTPUT</a:t>
             </a:r>
-            <a:endParaRPr lang="en-US" sz="1250" dirty="0"/>
+            <a:endParaRPr lang="en-US" sz="1400" dirty="0"/>
           </a:p>
         </p:txBody>
       </p:sp>
@@ -4525,7 +4956,7 @@
         </p:nvSpPr>
         <p:spPr>
           <a:xfrm>
-            <a:off x="6766560" y="2898648"/>
+            <a:off x="6766560" y="3082461"/>
             <a:ext cx="4572000" cy="1371600"/>
           </a:xfrm>
           <a:prstGeom prst="rect">
@@ -4546,7 +4977,7 @@
               <a:buChar char="•"/>
             </a:pPr>
             <a:r>
-              <a:rPr lang="en-US" sz="1100" dirty="0">
+              <a:rPr lang="en-US" sz="1400" dirty="0">
                 <a:solidFill>
                   <a:srgbClr val="D6DEE5"/>
                 </a:solidFill>
@@ -4556,7 +4987,7 @@
               </a:rPr>
               <a:t>Outdated software &amp; version detection</a:t>
             </a:r>
-            <a:endParaRPr lang="en-US" sz="1100" dirty="0"/>
+            <a:endParaRPr lang="en-US" sz="1400" dirty="0"/>
           </a:p>
           <a:p>
             <a:pPr marL="342900" indent="-342900">
@@ -4567,7 +4998,7 @@
               <a:buChar char="•"/>
             </a:pPr>
             <a:r>
-              <a:rPr lang="en-US" sz="1100" dirty="0">
+              <a:rPr lang="en-US" sz="1400" dirty="0">
                 <a:solidFill>
                   <a:srgbClr val="D6DEE5"/>
                 </a:solidFill>
@@ -4577,7 +5008,7 @@
               </a:rPr>
               <a:t>OWASP Top 10 (2025) risks</a:t>
             </a:r>
-            <a:endParaRPr lang="en-US" sz="1100" dirty="0"/>
+            <a:endParaRPr lang="en-US" sz="1400" dirty="0"/>
           </a:p>
           <a:p>
             <a:pPr marL="342900" indent="-342900">
@@ -4588,7 +5019,7 @@
               <a:buChar char="•"/>
             </a:pPr>
             <a:r>
-              <a:rPr lang="en-US" sz="1100" dirty="0">
+              <a:rPr lang="en-US" sz="1400" dirty="0">
                 <a:solidFill>
                   <a:srgbClr val="D6DEE5"/>
                 </a:solidFill>
@@ -4598,7 +5029,7 @@
               </a:rPr>
               <a:t>SOAR-enabled remediation — automated action playbook per finding</a:t>
             </a:r>
-            <a:endParaRPr lang="en-US" sz="1100" dirty="0"/>
+            <a:endParaRPr lang="en-US" sz="1400" dirty="0"/>
           </a:p>
           <a:p>
             <a:pPr marL="342900" indent="-342900">
@@ -4609,7 +5040,7 @@
               <a:buChar char="•"/>
             </a:pPr>
             <a:r>
-              <a:rPr lang="en-US" sz="1100" dirty="0">
+              <a:rPr lang="en-US" sz="1400" dirty="0">
                 <a:solidFill>
                   <a:srgbClr val="D6DEE5"/>
                 </a:solidFill>
@@ -4619,7 +5050,7 @@
               </a:rPr>
               <a:t>Clear remediation guidance</a:t>
             </a:r>
-            <a:endParaRPr lang="en-US" sz="1100" dirty="0"/>
+            <a:endParaRPr lang="en-US" sz="1400" dirty="0"/>
           </a:p>
         </p:txBody>
       </p:sp>
@@ -4631,7 +5062,7 @@
         </p:nvSpPr>
         <p:spPr>
           <a:xfrm>
-            <a:off x="6583680" y="4160520"/>
+            <a:off x="6583680" y="4586182"/>
             <a:ext cx="4754880" cy="274320"/>
           </a:xfrm>
           <a:prstGeom prst="rect">
@@ -4648,7 +5079,7 @@
               <a:buNone/>
             </a:pPr>
             <a:r>
-              <a:rPr lang="en-US" sz="1250" b="1" dirty="0">
+              <a:rPr lang="en-US" sz="1400" b="1" dirty="0">
                 <a:solidFill>
                   <a:srgbClr val="FFFFFF"/>
                 </a:solidFill>
@@ -4658,7 +5089,7 @@
               </a:rPr>
               <a:t>CONSTRAINTS</a:t>
             </a:r>
-            <a:endParaRPr lang="en-US" sz="1250" dirty="0"/>
+            <a:endParaRPr lang="en-US" sz="1400" dirty="0"/>
           </a:p>
         </p:txBody>
       </p:sp>
@@ -4670,7 +5101,7 @@
         </p:nvSpPr>
         <p:spPr>
           <a:xfrm>
-            <a:off x="6766560" y="4453128"/>
+            <a:off x="6766560" y="4787350"/>
             <a:ext cx="4572000" cy="1097280"/>
           </a:xfrm>
           <a:prstGeom prst="rect">
@@ -4691,7 +5122,7 @@
               <a:buChar char="•"/>
             </a:pPr>
             <a:r>
-              <a:rPr lang="en-US" sz="1100" dirty="0">
+              <a:rPr lang="en-US" sz="1400" dirty="0">
                 <a:solidFill>
                   <a:srgbClr val="D6DEE5"/>
                 </a:solidFill>
@@ -4701,7 +5132,7 @@
               </a:rPr>
               <a:t>Black-box only (real attacker’s view)</a:t>
             </a:r>
-            <a:endParaRPr lang="en-US" sz="1100" dirty="0"/>
+            <a:endParaRPr lang="en-US" sz="1400" dirty="0"/>
           </a:p>
           <a:p>
             <a:pPr marL="342900" indent="-342900">
@@ -4712,7 +5143,7 @@
               <a:buChar char="•"/>
             </a:pPr>
             <a:r>
-              <a:rPr lang="en-US" sz="1100" dirty="0">
+              <a:rPr lang="en-US" sz="1400" dirty="0">
                 <a:solidFill>
                   <a:srgbClr val="D6DEE5"/>
                 </a:solidFill>
@@ -4722,7 +5153,7 @@
               </a:rPr>
               <a:t>Non-destructive, read-only checks</a:t>
             </a:r>
-            <a:endParaRPr lang="en-US" sz="1100" dirty="0"/>
+            <a:endParaRPr lang="en-US" sz="1400" dirty="0"/>
           </a:p>
           <a:p>
             <a:pPr marL="342900" indent="-342900">
@@ -4733,7 +5164,7 @@
               <a:buChar char="•"/>
             </a:pPr>
             <a:r>
-              <a:rPr lang="en-US" sz="1100" dirty="0">
+              <a:rPr lang="en-US" sz="1400" dirty="0">
                 <a:solidFill>
                   <a:srgbClr val="D6DEE5"/>
                 </a:solidFill>
@@ -4743,7 +5174,7 @@
               </a:rPr>
               <a:t>Readable by developers and non-technical stakeholders</a:t>
             </a:r>
-            <a:endParaRPr lang="en-US" sz="1100" dirty="0"/>
+            <a:endParaRPr lang="en-US" sz="1400" dirty="0"/>
           </a:p>
         </p:txBody>
       </p:sp>
